--- a/dist/초2/수학/수와계산/초2_수학_수와계산_03_받아올림이있는두자리수덧셈.pptx
+++ b/dist/초2/수학/수와계산/초2_수학_수와계산_03_받아올림이있는두자리수덧셈.pptx
@@ -120,13 +120,13 @@
   <p:extLst>
     <p:ext uri="{521415D9-36F7-43E2-AB2F-B90AF26B5E84}">
       <p14:sectionLst xmlns:p14="http://schemas.microsoft.com/office/powerpoint/2010/main">
-        <p14:section name="도입" id="{19556cf2-4fcd-efdc-c116-088abe602103}">
+        <p14:section name="도입" id="{28a91c33-5f63-897d-4f08-f6d200a1d4f5}">
           <p14:sldIdLst>
             <p14:sldId id="256"/>
             <p14:sldId id="257"/>
           </p14:sldIdLst>
         </p14:section>
-        <p14:section name="개념" id="{8e89d420-91c6-2cd4-88f3-e0efe0e6a8e4}">
+        <p14:section name="개념" id="{8232b4c8-be9f-ca43-6bbb-8ccfac654978}">
           <p14:sldIdLst>
             <p14:sldId id="258"/>
             <p14:sldId id="259"/>
@@ -134,32 +134,32 @@
             <p14:sldId id="263"/>
           </p14:sldIdLst>
         </p14:section>
-        <p14:section name="연습" id="{5e485e2b-32a7-ff91-3b64-57c2fb51683a}">
+        <p14:section name="연습" id="{df13a8ba-865c-26dd-1ae4-7adac77357c2}">
           <p14:sldIdLst>
             <p14:sldId id="261"/>
             <p14:sldId id="262"/>
             <p14:sldId id="264"/>
           </p14:sldIdLst>
         </p14:section>
-        <p14:section name="개념" id="{955209f7-9ed4-8a74-184b-5b344392cc04}">
+        <p14:section name="개념" id="{01423791-8934-b3c9-f685-069980c3c4a3}">
           <p14:sldIdLst/>
         </p14:section>
-        <p14:section name="연습" id="{8920b1e3-e5ed-b34d-31f3-f453f5b5303c}">
+        <p14:section name="연습" id="{7bb9c98e-f7c9-4721-9f13-649a4d2246d4}">
           <p14:sldIdLst/>
         </p14:section>
-        <p14:section name="확인" id="{76474086-aefa-84d4-f6d0-b43de27e781c}">
+        <p14:section name="확인" id="{54878d93-e38e-6f0d-062a-178eeb854bb8}">
           <p14:sldIdLst>
             <p14:sldId id="265"/>
             <p14:sldId id="266"/>
             <p14:sldId id="267"/>
           </p14:sldIdLst>
         </p14:section>
-        <p14:section name="정리" id="{05a0d344-4efc-aebf-3555-83a52f1bb421}">
+        <p14:section name="정리" id="{a1462df0-50c9-d014-c10a-2506d79d8a94}">
           <p14:sldIdLst>
             <p14:sldId id="268"/>
           </p14:sldIdLst>
         </p14:section>
-        <p14:section name="보충" id="{c2016143-285e-804f-ff78-e27855d5e809}">
+        <p14:section name="보충" id="{d61ace85-5bd5-daab-ab98-c4089a6c458b}">
           <p14:sldIdLst>
             <p14:sldId id="269"/>
           </p14:sldIdLst>
@@ -3036,7 +3036,7 @@
           </p:nvPr>
         </p:nvGraphicFramePr>
         <p:xfrm>
-          <a:off x="8001000" y="883920"/>
+          <a:off x="8001000" y="922020"/>
           <a:ext cx="3291840" cy="914400"/>
         </p:xfrm>
         <a:graphic>
@@ -3048,7 +3048,7 @@
                 <a:gridCol w="1097280"/>
                 <a:gridCol w="1097280"/>
               </a:tblGrid>
-              <a:tr h="609600">
+              <a:tr h="590550">
                 <a:tc>
                   <a:txBody>
                     <a:bodyPr/>
@@ -3243,7 +3243,7 @@
                   </a:tcPr>
                 </a:tc>
               </a:tr>
-              <a:tr h="609600">
+              <a:tr h="590550">
                 <a:tc>
                   <a:txBody>
                     <a:bodyPr/>
@@ -3438,7 +3438,7 @@
                   </a:tcPr>
                 </a:tc>
               </a:tr>
-              <a:tr h="609600">
+              <a:tr h="590550">
                 <a:tc>
                   <a:txBody>
                     <a:bodyPr/>
@@ -3644,7 +3644,7 @@
                   </a:tcPr>
                 </a:tc>
               </a:tr>
-              <a:tr h="609600">
+              <a:tr h="590550">
                 <a:tc>
                   <a:txBody>
                     <a:bodyPr/>
@@ -19433,7 +19433,7 @@
           </p:nvPr>
         </p:nvGraphicFramePr>
         <p:xfrm>
-          <a:off x="7956469" y="2042160"/>
+          <a:off x="7956469" y="2089785"/>
           <a:ext cx="3291840" cy="914400"/>
         </p:xfrm>
         <a:graphic>
@@ -19445,7 +19445,7 @@
                 <a:gridCol w="1097280"/>
                 <a:gridCol w="1097280"/>
               </a:tblGrid>
-              <a:tr h="609600">
+              <a:tr h="590550">
                 <a:tc>
                   <a:txBody>
                     <a:bodyPr/>
@@ -19640,7 +19640,7 @@
                   </a:tcPr>
                 </a:tc>
               </a:tr>
-              <a:tr h="609600">
+              <a:tr h="590550">
                 <a:tc>
                   <a:txBody>
                     <a:bodyPr/>
@@ -19824,7 +19824,7 @@
                   </a:tcPr>
                 </a:tc>
               </a:tr>
-              <a:tr h="609600">
+              <a:tr h="590550">
                 <a:tc>
                   <a:txBody>
                     <a:bodyPr/>
@@ -20019,7 +20019,7 @@
                   </a:tcPr>
                 </a:tc>
               </a:tr>
-              <a:tr h="609600">
+              <a:tr h="590550">
                 <a:tc>
                   <a:txBody>
                     <a:bodyPr/>
@@ -20225,7 +20225,7 @@
                   </a:tcPr>
                 </a:tc>
               </a:tr>
-              <a:tr h="609600">
+              <a:tr h="590550">
                 <a:tc>
                   <a:txBody>
                     <a:bodyPr/>
@@ -20913,7 +20913,7 @@
           </p:nvPr>
         </p:nvGraphicFramePr>
         <p:xfrm>
-          <a:off x="7312914" y="2087499"/>
+          <a:off x="7312914" y="2027174"/>
           <a:ext cx="3291840" cy="914400"/>
         </p:xfrm>
         <a:graphic>
@@ -20925,7 +20925,7 @@
                 <a:gridCol w="1097280"/>
                 <a:gridCol w="1097280"/>
               </a:tblGrid>
-              <a:tr h="487680">
+              <a:tr h="511810">
                 <a:tc>
                   <a:txBody>
                     <a:bodyPr/>
@@ -20934,7 +20934,7 @@
                       <a:pPr eaLnBrk="0" algn="ctr" indent="0" marL="0">
                         <a:buNone/>
                       </a:pPr>
-                      <a:endParaRPr lang="en-US" sz="2400" dirty="0">
+                      <a:endParaRPr lang="en-US" sz="2600" dirty="0">
                         <a:latin typeface="맑은 고딕" charset="0"/>
                         <a:ea typeface="맑은 고딕" charset="0"/>
                         <a:cs typeface="맑은 고딕" charset="0"/>
@@ -20992,7 +20992,7 @@
                         <a:buNone/>
                       </a:pPr>
                       <a:r>
-                        <a:rPr lang="en-US" sz="2400" b="1" dirty="0">
+                        <a:rPr lang="en-US" sz="2600" b="1" dirty="0">
                           <a:solidFill>
                             <a:srgbClr val="1F2937"/>
                           </a:solidFill>
@@ -21002,7 +21002,7 @@
                         </a:rPr>
                         <a:t>십</a:t>
                       </a:r>
-                      <a:endParaRPr lang="en-US" sz="2400" dirty="0">
+                      <a:endParaRPr lang="en-US" sz="2600" dirty="0">
                         <a:latin typeface="맑은 고딕" charset="0"/>
                         <a:ea typeface="맑은 고딕" charset="0"/>
                         <a:cs typeface="맑은 고딕" charset="0"/>
@@ -21060,7 +21060,7 @@
                         <a:buNone/>
                       </a:pPr>
                       <a:r>
-                        <a:rPr lang="en-US" sz="2400" b="1" dirty="0">
+                        <a:rPr lang="en-US" sz="2600" b="1" dirty="0">
                           <a:solidFill>
                             <a:srgbClr val="1F2937"/>
                           </a:solidFill>
@@ -21070,7 +21070,7 @@
                         </a:rPr>
                         <a:t>일</a:t>
                       </a:r>
-                      <a:endParaRPr lang="en-US" sz="2400" dirty="0">
+                      <a:endParaRPr lang="en-US" sz="2600" dirty="0">
                         <a:latin typeface="맑은 고딕" charset="0"/>
                         <a:ea typeface="맑은 고딕" charset="0"/>
                         <a:cs typeface="맑은 고딕" charset="0"/>
@@ -21120,7 +21120,7 @@
                   </a:tcPr>
                 </a:tc>
               </a:tr>
-              <a:tr h="487680">
+              <a:tr h="511810">
                 <a:tc>
                   <a:txBody>
                     <a:bodyPr/>
@@ -21129,7 +21129,7 @@
                       <a:pPr eaLnBrk="0" algn="ctr" indent="0" marL="0">
                         <a:buNone/>
                       </a:pPr>
-                      <a:endParaRPr lang="en-US" sz="2400" dirty="0">
+                      <a:endParaRPr lang="en-US" sz="2600" dirty="0">
                         <a:latin typeface="맑은 고딕" charset="0"/>
                         <a:ea typeface="맑은 고딕" charset="0"/>
                         <a:cs typeface="맑은 고딕" charset="0"/>
@@ -21187,7 +21187,7 @@
                         <a:buNone/>
                       </a:pPr>
                       <a:r>
-                        <a:rPr lang="en-US" sz="2400" dirty="0">
+                        <a:rPr lang="en-US" sz="2600" dirty="0">
                           <a:solidFill>
                             <a:srgbClr val="1F2937"/>
                           </a:solidFill>
@@ -21197,7 +21197,7 @@
                         </a:rPr>
                         <a:t>□</a:t>
                       </a:r>
-                      <a:endParaRPr lang="en-US" sz="2400" dirty="0">
+                      <a:endParaRPr lang="en-US" sz="2600" dirty="0">
                         <a:latin typeface="맑은 고딕" charset="0"/>
                         <a:ea typeface="맑은 고딕" charset="0"/>
                         <a:cs typeface="맑은 고딕" charset="0"/>
@@ -21254,7 +21254,7 @@
                       <a:pPr eaLnBrk="0" algn="ctr" indent="0" marL="0">
                         <a:buNone/>
                       </a:pPr>
-                      <a:endParaRPr lang="en-US" sz="2400" dirty="0">
+                      <a:endParaRPr lang="en-US" sz="2600" dirty="0">
                         <a:latin typeface="맑은 고딕" charset="0"/>
                         <a:ea typeface="맑은 고딕" charset="0"/>
                         <a:cs typeface="맑은 고딕" charset="0"/>
@@ -21304,7 +21304,7 @@
                   </a:tcPr>
                 </a:tc>
               </a:tr>
-              <a:tr h="487680">
+              <a:tr h="511810">
                 <a:tc>
                   <a:txBody>
                     <a:bodyPr/>
@@ -21313,7 +21313,7 @@
                       <a:pPr eaLnBrk="0" algn="ctr" indent="0" marL="0">
                         <a:buNone/>
                       </a:pPr>
-                      <a:endParaRPr lang="en-US" sz="2400" dirty="0">
+                      <a:endParaRPr lang="en-US" sz="2600" dirty="0">
                         <a:latin typeface="맑은 고딕" charset="0"/>
                         <a:ea typeface="맑은 고딕" charset="0"/>
                         <a:cs typeface="맑은 고딕" charset="0"/>
@@ -21371,7 +21371,7 @@
                         <a:buNone/>
                       </a:pPr>
                       <a:r>
-                        <a:rPr lang="en-US" sz="2400" dirty="0">
+                        <a:rPr lang="en-US" sz="2600" dirty="0">
                           <a:solidFill>
                             <a:srgbClr val="1F2937"/>
                           </a:solidFill>
@@ -21381,7 +21381,7 @@
                         </a:rPr>
                         <a:t>4</a:t>
                       </a:r>
-                      <a:endParaRPr lang="en-US" sz="2400" dirty="0">
+                      <a:endParaRPr lang="en-US" sz="2600" dirty="0">
                         <a:latin typeface="맑은 고딕" charset="0"/>
                         <a:ea typeface="맑은 고딕" charset="0"/>
                         <a:cs typeface="맑은 고딕" charset="0"/>
@@ -21439,7 +21439,7 @@
                         <a:buNone/>
                       </a:pPr>
                       <a:r>
-                        <a:rPr lang="en-US" sz="2400" dirty="0">
+                        <a:rPr lang="en-US" sz="2600" dirty="0">
                           <a:solidFill>
                             <a:srgbClr val="1F2937"/>
                           </a:solidFill>
@@ -21449,7 +21449,7 @@
                         </a:rPr>
                         <a:t>6</a:t>
                       </a:r>
-                      <a:endParaRPr lang="en-US" sz="2400" dirty="0">
+                      <a:endParaRPr lang="en-US" sz="2600" dirty="0">
                         <a:latin typeface="맑은 고딕" charset="0"/>
                         <a:ea typeface="맑은 고딕" charset="0"/>
                         <a:cs typeface="맑은 고딕" charset="0"/>
@@ -21499,7 +21499,7 @@
                   </a:tcPr>
                 </a:tc>
               </a:tr>
-              <a:tr h="487680">
+              <a:tr h="511810">
                 <a:tc>
                   <a:txBody>
                     <a:bodyPr/>
@@ -21509,7 +21509,7 @@
                         <a:buNone/>
                       </a:pPr>
                       <a:r>
-                        <a:rPr lang="en-US" sz="2400" dirty="0">
+                        <a:rPr lang="en-US" sz="2600" dirty="0">
                           <a:solidFill>
                             <a:srgbClr val="1F2937"/>
                           </a:solidFill>
@@ -21519,7 +21519,7 @@
                         </a:rPr>
                         <a:t>+</a:t>
                       </a:r>
-                      <a:endParaRPr lang="en-US" sz="2400" dirty="0">
+                      <a:endParaRPr lang="en-US" sz="2600" dirty="0">
                         <a:latin typeface="맑은 고딕" charset="0"/>
                         <a:ea typeface="맑은 고딕" charset="0"/>
                         <a:cs typeface="맑은 고딕" charset="0"/>
@@ -21577,7 +21577,7 @@
                         <a:buNone/>
                       </a:pPr>
                       <a:r>
-                        <a:rPr lang="en-US" sz="2400" dirty="0">
+                        <a:rPr lang="en-US" sz="2600" dirty="0">
                           <a:solidFill>
                             <a:srgbClr val="1F2937"/>
                           </a:solidFill>
@@ -21587,7 +21587,7 @@
                         </a:rPr>
                         <a:t>2</a:t>
                       </a:r>
-                      <a:endParaRPr lang="en-US" sz="2400" dirty="0">
+                      <a:endParaRPr lang="en-US" sz="2600" dirty="0">
                         <a:latin typeface="맑은 고딕" charset="0"/>
                         <a:ea typeface="맑은 고딕" charset="0"/>
                         <a:cs typeface="맑은 고딕" charset="0"/>
@@ -21645,7 +21645,7 @@
                         <a:buNone/>
                       </a:pPr>
                       <a:r>
-                        <a:rPr lang="en-US" sz="2400" dirty="0">
+                        <a:rPr lang="en-US" sz="2600" dirty="0">
                           <a:solidFill>
                             <a:srgbClr val="1F2937"/>
                           </a:solidFill>
@@ -21655,7 +21655,7 @@
                         </a:rPr>
                         <a:t>9</a:t>
                       </a:r>
-                      <a:endParaRPr lang="en-US" sz="2400" dirty="0">
+                      <a:endParaRPr lang="en-US" sz="2600" dirty="0">
                         <a:latin typeface="맑은 고딕" charset="0"/>
                         <a:ea typeface="맑은 고딕" charset="0"/>
                         <a:cs typeface="맑은 고딕" charset="0"/>
@@ -21705,7 +21705,7 @@
                   </a:tcPr>
                 </a:tc>
               </a:tr>
-              <a:tr h="487680">
+              <a:tr h="511810">
                 <a:tc>
                   <a:txBody>
                     <a:bodyPr/>
@@ -21714,7 +21714,7 @@
                       <a:pPr eaLnBrk="0" algn="ctr" indent="0" marL="0">
                         <a:buNone/>
                       </a:pPr>
-                      <a:endParaRPr lang="en-US" sz="2400" dirty="0">
+                      <a:endParaRPr lang="en-US" sz="2600" dirty="0">
                         <a:latin typeface="맑은 고딕" charset="0"/>
                         <a:ea typeface="맑은 고딕" charset="0"/>
                         <a:cs typeface="맑은 고딕" charset="0"/>
@@ -21772,7 +21772,7 @@
                         <a:buNone/>
                       </a:pPr>
                       <a:r>
-                        <a:rPr lang="en-US" sz="2400" dirty="0">
+                        <a:rPr lang="en-US" sz="2600" dirty="0">
                           <a:solidFill>
                             <a:srgbClr val="1F2937"/>
                           </a:solidFill>
@@ -21782,7 +21782,7 @@
                         </a:rPr>
                         <a:t>□</a:t>
                       </a:r>
-                      <a:endParaRPr lang="en-US" sz="2400" dirty="0">
+                      <a:endParaRPr lang="en-US" sz="2600" dirty="0">
                         <a:latin typeface="맑은 고딕" charset="0"/>
                         <a:ea typeface="맑은 고딕" charset="0"/>
                         <a:cs typeface="맑은 고딕" charset="0"/>
@@ -21840,7 +21840,7 @@
                         <a:buNone/>
                       </a:pPr>
                       <a:r>
-                        <a:rPr lang="en-US" sz="2400" dirty="0">
+                        <a:rPr lang="en-US" sz="2600" dirty="0">
                           <a:solidFill>
                             <a:srgbClr val="1F2937"/>
                           </a:solidFill>
@@ -21850,7 +21850,7 @@
                         </a:rPr>
                         <a:t>□</a:t>
                       </a:r>
-                      <a:endParaRPr lang="en-US" sz="2400" dirty="0">
+                      <a:endParaRPr lang="en-US" sz="2600" dirty="0">
                         <a:latin typeface="맑은 고딕" charset="0"/>
                         <a:ea typeface="맑은 고딕" charset="0"/>
                         <a:cs typeface="맑은 고딕" charset="0"/>
@@ -22896,7 +22896,7 @@
           </p:nvPr>
         </p:nvGraphicFramePr>
         <p:xfrm>
-          <a:off x="7483450" y="2042160"/>
+          <a:off x="7483450" y="2089785"/>
           <a:ext cx="4023360" cy="914400"/>
         </p:xfrm>
         <a:graphic>
@@ -22909,7 +22909,7 @@
                 <a:gridCol w="1005840"/>
                 <a:gridCol w="1005840"/>
               </a:tblGrid>
-              <a:tr h="609600">
+              <a:tr h="590550">
                 <a:tc>
                   <a:txBody>
                     <a:bodyPr/>
@@ -23172,7 +23172,7 @@
                   </a:tcPr>
                 </a:tc>
               </a:tr>
-              <a:tr h="609600">
+              <a:tr h="590550">
                 <a:tc>
                   <a:txBody>
                     <a:bodyPr/>
@@ -23413,7 +23413,7 @@
                   </a:tcPr>
                 </a:tc>
               </a:tr>
-              <a:tr h="609600">
+              <a:tr h="590550">
                 <a:tc>
                   <a:txBody>
                     <a:bodyPr/>
@@ -23665,7 +23665,7 @@
                   </a:tcPr>
                 </a:tc>
               </a:tr>
-              <a:tr h="609600">
+              <a:tr h="590550">
                 <a:tc>
                   <a:txBody>
                     <a:bodyPr/>
@@ -23928,7 +23928,7 @@
                   </a:tcPr>
                 </a:tc>
               </a:tr>
-              <a:tr h="609600">
+              <a:tr h="590550">
                 <a:tc>
                   <a:txBody>
                     <a:bodyPr/>
